--- a/public/videos/repositories/foodtruck-map/foodtruck-map-tech-preview.pptx
+++ b/public/videos/repositories/foodtruck-map/foodtruck-map-tech-preview.pptx
@@ -134,7 +134,7 @@
           <p:cNvPr id="2" name="タイトル 1">
             <a:extLst>
               <a:ext uri="{FF2B5EF4-FFF2-40B4-BE49-F238E27FC236}">
-                <a16:creationId xmlns:a16="http://schemas.microsoft.com/office/drawing/2014/main" id="{F1D4FBF1-86F4-1E9F-54B1-1672BCDE7497}"/>
+                <a16:creationId xmlns:a16="http://schemas.microsoft.com/office/drawing/2014/main" id="{B9CB240B-7828-8393-636A-BA55A24E9926}"/>
               </a:ext>
             </a:extLst>
           </p:cNvPr>
@@ -171,7 +171,7 @@
           <p:cNvPr id="3" name="字幕 2">
             <a:extLst>
               <a:ext uri="{FF2B5EF4-FFF2-40B4-BE49-F238E27FC236}">
-                <a16:creationId xmlns:a16="http://schemas.microsoft.com/office/drawing/2014/main" id="{EC6C850F-1081-5528-0862-CE1F5AA34E3D}"/>
+                <a16:creationId xmlns:a16="http://schemas.microsoft.com/office/drawing/2014/main" id="{EB2C15CF-5892-3F43-FE23-7A7D33C2D027}"/>
               </a:ext>
             </a:extLst>
           </p:cNvPr>
@@ -241,7 +241,7 @@
           <p:cNvPr id="4" name="日付プレースホルダー 3">
             <a:extLst>
               <a:ext uri="{FF2B5EF4-FFF2-40B4-BE49-F238E27FC236}">
-                <a16:creationId xmlns:a16="http://schemas.microsoft.com/office/drawing/2014/main" id="{D5D1E6E4-5E92-B080-511C-BB8A196A233F}"/>
+                <a16:creationId xmlns:a16="http://schemas.microsoft.com/office/drawing/2014/main" id="{C162A78B-08D7-374F-DDD3-91C748CD1E96}"/>
               </a:ext>
             </a:extLst>
           </p:cNvPr>
@@ -257,7 +257,7 @@
           <a:bodyPr/>
           <a:lstStyle/>
           <a:p>
-            <a:fld id="{F6FFFDC3-8FAB-4C9F-82D1-9E12C85EA6BF}" type="datetimeFigureOut">
+            <a:fld id="{67C56D98-5E46-4070-BB64-A0CF120B6A66}" type="datetimeFigureOut">
               <a:rPr kumimoji="1" lang="ja-JP" altLang="en-US" smtClean="0"/>
               <a:t>2026/7/30</a:t>
             </a:fld>
@@ -270,7 +270,7 @@
           <p:cNvPr id="5" name="フッター プレースホルダー 4">
             <a:extLst>
               <a:ext uri="{FF2B5EF4-FFF2-40B4-BE49-F238E27FC236}">
-                <a16:creationId xmlns:a16="http://schemas.microsoft.com/office/drawing/2014/main" id="{72064C16-7D04-4F16-FB3B-4D4C6A7DA7D6}"/>
+                <a16:creationId xmlns:a16="http://schemas.microsoft.com/office/drawing/2014/main" id="{072EF5CF-B44E-8E45-3995-ED18BC6448E1}"/>
               </a:ext>
             </a:extLst>
           </p:cNvPr>
@@ -295,7 +295,7 @@
           <p:cNvPr id="6" name="スライド番号プレースホルダー 5">
             <a:extLst>
               <a:ext uri="{FF2B5EF4-FFF2-40B4-BE49-F238E27FC236}">
-                <a16:creationId xmlns:a16="http://schemas.microsoft.com/office/drawing/2014/main" id="{10E043AB-862E-BD90-2482-62082E3F0CD4}"/>
+                <a16:creationId xmlns:a16="http://schemas.microsoft.com/office/drawing/2014/main" id="{311D53B3-519F-D4B7-65FE-84C4965BFAA9}"/>
               </a:ext>
             </a:extLst>
           </p:cNvPr>
@@ -311,7 +311,7 @@
           <a:bodyPr/>
           <a:lstStyle/>
           <a:p>
-            <a:fld id="{B60B11BF-5DD5-4531-B735-ECDF5ECF92D3}" type="slidenum">
+            <a:fld id="{EF893B2B-97C6-4A98-80C9-AA2D2E6E4430}" type="slidenum">
               <a:rPr kumimoji="1" lang="ja-JP" altLang="en-US" smtClean="0"/>
               <a:t>‹#›</a:t>
             </a:fld>
@@ -322,7 +322,7 @@
     </p:spTree>
     <p:extLst>
       <p:ext uri="{BB962C8B-B14F-4D97-AF65-F5344CB8AC3E}">
-        <p14:creationId xmlns:p14="http://schemas.microsoft.com/office/powerpoint/2010/main" val="347349065"/>
+        <p14:creationId xmlns:p14="http://schemas.microsoft.com/office/powerpoint/2010/main" val="3262901929"/>
       </p:ext>
     </p:extLst>
   </p:cSld>
@@ -354,7 +354,7 @@
           <p:cNvPr id="2" name="タイトル 1">
             <a:extLst>
               <a:ext uri="{FF2B5EF4-FFF2-40B4-BE49-F238E27FC236}">
-                <a16:creationId xmlns:a16="http://schemas.microsoft.com/office/drawing/2014/main" id="{4023F697-0A1E-E511-93EA-75265C2C80A8}"/>
+                <a16:creationId xmlns:a16="http://schemas.microsoft.com/office/drawing/2014/main" id="{6DF416DC-9EDB-4C27-61B5-802506083DE7}"/>
               </a:ext>
             </a:extLst>
           </p:cNvPr>
@@ -382,7 +382,7 @@
           <p:cNvPr id="3" name="縦書きテキスト プレースホルダー 2">
             <a:extLst>
               <a:ext uri="{FF2B5EF4-FFF2-40B4-BE49-F238E27FC236}">
-                <a16:creationId xmlns:a16="http://schemas.microsoft.com/office/drawing/2014/main" id="{C938D70C-0947-CB87-053A-389B7131D6C4}"/>
+                <a16:creationId xmlns:a16="http://schemas.microsoft.com/office/drawing/2014/main" id="{DACF8C75-19C3-8E8F-0AB7-16135BD99781}"/>
               </a:ext>
             </a:extLst>
           </p:cNvPr>
@@ -471,7 +471,7 @@
           <p:cNvPr id="4" name="日付プレースホルダー 3">
             <a:extLst>
               <a:ext uri="{FF2B5EF4-FFF2-40B4-BE49-F238E27FC236}">
-                <a16:creationId xmlns:a16="http://schemas.microsoft.com/office/drawing/2014/main" id="{14B8B703-3DCB-0B55-E72B-060465527139}"/>
+                <a16:creationId xmlns:a16="http://schemas.microsoft.com/office/drawing/2014/main" id="{44CA6EFB-C1B3-2A8C-BEA9-6D8789872B3C}"/>
               </a:ext>
             </a:extLst>
           </p:cNvPr>
@@ -487,7 +487,7 @@
           <a:bodyPr/>
           <a:lstStyle/>
           <a:p>
-            <a:fld id="{F6FFFDC3-8FAB-4C9F-82D1-9E12C85EA6BF}" type="datetimeFigureOut">
+            <a:fld id="{67C56D98-5E46-4070-BB64-A0CF120B6A66}" type="datetimeFigureOut">
               <a:rPr kumimoji="1" lang="ja-JP" altLang="en-US" smtClean="0"/>
               <a:t>2026/7/30</a:t>
             </a:fld>
@@ -500,7 +500,7 @@
           <p:cNvPr id="5" name="フッター プレースホルダー 4">
             <a:extLst>
               <a:ext uri="{FF2B5EF4-FFF2-40B4-BE49-F238E27FC236}">
-                <a16:creationId xmlns:a16="http://schemas.microsoft.com/office/drawing/2014/main" id="{E5BDB87E-F87D-0154-4045-DF250CE49EAC}"/>
+                <a16:creationId xmlns:a16="http://schemas.microsoft.com/office/drawing/2014/main" id="{29E38FA8-B7A9-D1C0-18F0-3E01253C471C}"/>
               </a:ext>
             </a:extLst>
           </p:cNvPr>
@@ -525,7 +525,7 @@
           <p:cNvPr id="6" name="スライド番号プレースホルダー 5">
             <a:extLst>
               <a:ext uri="{FF2B5EF4-FFF2-40B4-BE49-F238E27FC236}">
-                <a16:creationId xmlns:a16="http://schemas.microsoft.com/office/drawing/2014/main" id="{10C57CE5-30DA-6C17-206D-0F68DB273EE4}"/>
+                <a16:creationId xmlns:a16="http://schemas.microsoft.com/office/drawing/2014/main" id="{C8102BCF-4AFA-2EC4-4F21-B0D3C92D3243}"/>
               </a:ext>
             </a:extLst>
           </p:cNvPr>
@@ -541,7 +541,7 @@
           <a:bodyPr/>
           <a:lstStyle/>
           <a:p>
-            <a:fld id="{B60B11BF-5DD5-4531-B735-ECDF5ECF92D3}" type="slidenum">
+            <a:fld id="{EF893B2B-97C6-4A98-80C9-AA2D2E6E4430}" type="slidenum">
               <a:rPr kumimoji="1" lang="ja-JP" altLang="en-US" smtClean="0"/>
               <a:t>‹#›</a:t>
             </a:fld>
@@ -552,7 +552,7 @@
     </p:spTree>
     <p:extLst>
       <p:ext uri="{BB962C8B-B14F-4D97-AF65-F5344CB8AC3E}">
-        <p14:creationId xmlns:p14="http://schemas.microsoft.com/office/powerpoint/2010/main" val="2665994170"/>
+        <p14:creationId xmlns:p14="http://schemas.microsoft.com/office/powerpoint/2010/main" val="286457116"/>
       </p:ext>
     </p:extLst>
   </p:cSld>
@@ -584,7 +584,7 @@
           <p:cNvPr id="2" name="縦書きタイトル 1">
             <a:extLst>
               <a:ext uri="{FF2B5EF4-FFF2-40B4-BE49-F238E27FC236}">
-                <a16:creationId xmlns:a16="http://schemas.microsoft.com/office/drawing/2014/main" id="{8DA8DDD3-5E07-98A4-210B-F7CFD891EA6C}"/>
+                <a16:creationId xmlns:a16="http://schemas.microsoft.com/office/drawing/2014/main" id="{6F1F0662-2F7B-8B2F-5018-9FAD06DC0C2D}"/>
               </a:ext>
             </a:extLst>
           </p:cNvPr>
@@ -617,7 +617,7 @@
           <p:cNvPr id="3" name="縦書きテキスト プレースホルダー 2">
             <a:extLst>
               <a:ext uri="{FF2B5EF4-FFF2-40B4-BE49-F238E27FC236}">
-                <a16:creationId xmlns:a16="http://schemas.microsoft.com/office/drawing/2014/main" id="{80175AEE-D7D5-F077-56E8-2CE2BFC56C7D}"/>
+                <a16:creationId xmlns:a16="http://schemas.microsoft.com/office/drawing/2014/main" id="{F133D547-8FD3-0267-4BA4-2394D52736E5}"/>
               </a:ext>
             </a:extLst>
           </p:cNvPr>
@@ -711,7 +711,7 @@
           <p:cNvPr id="4" name="日付プレースホルダー 3">
             <a:extLst>
               <a:ext uri="{FF2B5EF4-FFF2-40B4-BE49-F238E27FC236}">
-                <a16:creationId xmlns:a16="http://schemas.microsoft.com/office/drawing/2014/main" id="{12216360-A776-7A18-FC34-DB93638D7E8B}"/>
+                <a16:creationId xmlns:a16="http://schemas.microsoft.com/office/drawing/2014/main" id="{B5C9B65D-123F-5AE5-15B0-E8760E94514D}"/>
               </a:ext>
             </a:extLst>
           </p:cNvPr>
@@ -727,7 +727,7 @@
           <a:bodyPr/>
           <a:lstStyle/>
           <a:p>
-            <a:fld id="{F6FFFDC3-8FAB-4C9F-82D1-9E12C85EA6BF}" type="datetimeFigureOut">
+            <a:fld id="{67C56D98-5E46-4070-BB64-A0CF120B6A66}" type="datetimeFigureOut">
               <a:rPr kumimoji="1" lang="ja-JP" altLang="en-US" smtClean="0"/>
               <a:t>2026/7/30</a:t>
             </a:fld>
@@ -740,7 +740,7 @@
           <p:cNvPr id="5" name="フッター プレースホルダー 4">
             <a:extLst>
               <a:ext uri="{FF2B5EF4-FFF2-40B4-BE49-F238E27FC236}">
-                <a16:creationId xmlns:a16="http://schemas.microsoft.com/office/drawing/2014/main" id="{52A69F9F-4CB9-4194-BFCF-BA8728455F58}"/>
+                <a16:creationId xmlns:a16="http://schemas.microsoft.com/office/drawing/2014/main" id="{4C1DC978-459D-6A6D-0FDA-67F41AB9792F}"/>
               </a:ext>
             </a:extLst>
           </p:cNvPr>
@@ -765,7 +765,7 @@
           <p:cNvPr id="6" name="スライド番号プレースホルダー 5">
             <a:extLst>
               <a:ext uri="{FF2B5EF4-FFF2-40B4-BE49-F238E27FC236}">
-                <a16:creationId xmlns:a16="http://schemas.microsoft.com/office/drawing/2014/main" id="{71CAD854-CCBC-C799-D73A-917DB4DBA040}"/>
+                <a16:creationId xmlns:a16="http://schemas.microsoft.com/office/drawing/2014/main" id="{488A2E6B-26CC-55FE-AC99-A2DA5DF49CA1}"/>
               </a:ext>
             </a:extLst>
           </p:cNvPr>
@@ -781,7 +781,7 @@
           <a:bodyPr/>
           <a:lstStyle/>
           <a:p>
-            <a:fld id="{B60B11BF-5DD5-4531-B735-ECDF5ECF92D3}" type="slidenum">
+            <a:fld id="{EF893B2B-97C6-4A98-80C9-AA2D2E6E4430}" type="slidenum">
               <a:rPr kumimoji="1" lang="ja-JP" altLang="en-US" smtClean="0"/>
               <a:t>‹#›</a:t>
             </a:fld>
@@ -792,7 +792,7 @@
     </p:spTree>
     <p:extLst>
       <p:ext uri="{BB962C8B-B14F-4D97-AF65-F5344CB8AC3E}">
-        <p14:creationId xmlns:p14="http://schemas.microsoft.com/office/powerpoint/2010/main" val="593930184"/>
+        <p14:creationId xmlns:p14="http://schemas.microsoft.com/office/powerpoint/2010/main" val="2474277212"/>
       </p:ext>
     </p:extLst>
   </p:cSld>
@@ -824,7 +824,7 @@
           <p:cNvPr id="2" name="タイトル 1">
             <a:extLst>
               <a:ext uri="{FF2B5EF4-FFF2-40B4-BE49-F238E27FC236}">
-                <a16:creationId xmlns:a16="http://schemas.microsoft.com/office/drawing/2014/main" id="{706FEC9C-EEC4-C83D-7B0F-10B70DFD748A}"/>
+                <a16:creationId xmlns:a16="http://schemas.microsoft.com/office/drawing/2014/main" id="{A57E4322-7096-E410-6A45-6FC17D06AC99}"/>
               </a:ext>
             </a:extLst>
           </p:cNvPr>
@@ -852,7 +852,7 @@
           <p:cNvPr id="3" name="コンテンツ プレースホルダー 2">
             <a:extLst>
               <a:ext uri="{FF2B5EF4-FFF2-40B4-BE49-F238E27FC236}">
-                <a16:creationId xmlns:a16="http://schemas.microsoft.com/office/drawing/2014/main" id="{C5D014BC-4995-BE22-3F9C-950B3C032FFF}"/>
+                <a16:creationId xmlns:a16="http://schemas.microsoft.com/office/drawing/2014/main" id="{2A53F384-862A-3998-65A5-29B2F5A0E024}"/>
               </a:ext>
             </a:extLst>
           </p:cNvPr>
@@ -941,7 +941,7 @@
           <p:cNvPr id="4" name="日付プレースホルダー 3">
             <a:extLst>
               <a:ext uri="{FF2B5EF4-FFF2-40B4-BE49-F238E27FC236}">
-                <a16:creationId xmlns:a16="http://schemas.microsoft.com/office/drawing/2014/main" id="{BB8A079C-2DBE-3FF1-71C5-0CCC6EDFE785}"/>
+                <a16:creationId xmlns:a16="http://schemas.microsoft.com/office/drawing/2014/main" id="{1A28534B-23B7-9BE5-726C-7C02E4B04B30}"/>
               </a:ext>
             </a:extLst>
           </p:cNvPr>
@@ -957,7 +957,7 @@
           <a:bodyPr/>
           <a:lstStyle/>
           <a:p>
-            <a:fld id="{F6FFFDC3-8FAB-4C9F-82D1-9E12C85EA6BF}" type="datetimeFigureOut">
+            <a:fld id="{67C56D98-5E46-4070-BB64-A0CF120B6A66}" type="datetimeFigureOut">
               <a:rPr kumimoji="1" lang="ja-JP" altLang="en-US" smtClean="0"/>
               <a:t>2026/7/30</a:t>
             </a:fld>
@@ -970,7 +970,7 @@
           <p:cNvPr id="5" name="フッター プレースホルダー 4">
             <a:extLst>
               <a:ext uri="{FF2B5EF4-FFF2-40B4-BE49-F238E27FC236}">
-                <a16:creationId xmlns:a16="http://schemas.microsoft.com/office/drawing/2014/main" id="{3A23983A-C9AA-8BD0-755E-2ABEC13D8454}"/>
+                <a16:creationId xmlns:a16="http://schemas.microsoft.com/office/drawing/2014/main" id="{9845E52B-250D-E55C-B028-BC77B89D087A}"/>
               </a:ext>
             </a:extLst>
           </p:cNvPr>
@@ -995,7 +995,7 @@
           <p:cNvPr id="6" name="スライド番号プレースホルダー 5">
             <a:extLst>
               <a:ext uri="{FF2B5EF4-FFF2-40B4-BE49-F238E27FC236}">
-                <a16:creationId xmlns:a16="http://schemas.microsoft.com/office/drawing/2014/main" id="{9365CAA4-2DB6-708F-56CD-417141A27D12}"/>
+                <a16:creationId xmlns:a16="http://schemas.microsoft.com/office/drawing/2014/main" id="{6EB7CAD7-32CC-A19B-B2CA-24176FDB7989}"/>
               </a:ext>
             </a:extLst>
           </p:cNvPr>
@@ -1011,7 +1011,7 @@
           <a:bodyPr/>
           <a:lstStyle/>
           <a:p>
-            <a:fld id="{B60B11BF-5DD5-4531-B735-ECDF5ECF92D3}" type="slidenum">
+            <a:fld id="{EF893B2B-97C6-4A98-80C9-AA2D2E6E4430}" type="slidenum">
               <a:rPr kumimoji="1" lang="ja-JP" altLang="en-US" smtClean="0"/>
               <a:t>‹#›</a:t>
             </a:fld>
@@ -1022,7 +1022,7 @@
     </p:spTree>
     <p:extLst>
       <p:ext uri="{BB962C8B-B14F-4D97-AF65-F5344CB8AC3E}">
-        <p14:creationId xmlns:p14="http://schemas.microsoft.com/office/powerpoint/2010/main" val="3385592716"/>
+        <p14:creationId xmlns:p14="http://schemas.microsoft.com/office/powerpoint/2010/main" val="304253981"/>
       </p:ext>
     </p:extLst>
   </p:cSld>
@@ -1054,7 +1054,7 @@
           <p:cNvPr id="2" name="タイトル 1">
             <a:extLst>
               <a:ext uri="{FF2B5EF4-FFF2-40B4-BE49-F238E27FC236}">
-                <a16:creationId xmlns:a16="http://schemas.microsoft.com/office/drawing/2014/main" id="{2F3DDB8F-2120-9FEE-5BE4-92FE42C76F3E}"/>
+                <a16:creationId xmlns:a16="http://schemas.microsoft.com/office/drawing/2014/main" id="{8999D4D3-8EE9-F3ED-EEDD-245041EC85DB}"/>
               </a:ext>
             </a:extLst>
           </p:cNvPr>
@@ -1091,7 +1091,7 @@
           <p:cNvPr id="3" name="テキスト プレースホルダー 2">
             <a:extLst>
               <a:ext uri="{FF2B5EF4-FFF2-40B4-BE49-F238E27FC236}">
-                <a16:creationId xmlns:a16="http://schemas.microsoft.com/office/drawing/2014/main" id="{0EEEDEA8-0291-76B6-E8CE-22690A23D51F}"/>
+                <a16:creationId xmlns:a16="http://schemas.microsoft.com/office/drawing/2014/main" id="{35DF203B-DFEE-CEEE-5E92-20AEE437B562}"/>
               </a:ext>
             </a:extLst>
           </p:cNvPr>
@@ -1216,7 +1216,7 @@
           <p:cNvPr id="4" name="日付プレースホルダー 3">
             <a:extLst>
               <a:ext uri="{FF2B5EF4-FFF2-40B4-BE49-F238E27FC236}">
-                <a16:creationId xmlns:a16="http://schemas.microsoft.com/office/drawing/2014/main" id="{45B6388A-C5FD-5602-CB98-301C1B35BC39}"/>
+                <a16:creationId xmlns:a16="http://schemas.microsoft.com/office/drawing/2014/main" id="{64FBA7D7-9FF5-C201-FA22-7E9DDF10A052}"/>
               </a:ext>
             </a:extLst>
           </p:cNvPr>
@@ -1232,7 +1232,7 @@
           <a:bodyPr/>
           <a:lstStyle/>
           <a:p>
-            <a:fld id="{F6FFFDC3-8FAB-4C9F-82D1-9E12C85EA6BF}" type="datetimeFigureOut">
+            <a:fld id="{67C56D98-5E46-4070-BB64-A0CF120B6A66}" type="datetimeFigureOut">
               <a:rPr kumimoji="1" lang="ja-JP" altLang="en-US" smtClean="0"/>
               <a:t>2026/7/30</a:t>
             </a:fld>
@@ -1245,7 +1245,7 @@
           <p:cNvPr id="5" name="フッター プレースホルダー 4">
             <a:extLst>
               <a:ext uri="{FF2B5EF4-FFF2-40B4-BE49-F238E27FC236}">
-                <a16:creationId xmlns:a16="http://schemas.microsoft.com/office/drawing/2014/main" id="{69131C03-4722-9883-0410-B79BED93E4C0}"/>
+                <a16:creationId xmlns:a16="http://schemas.microsoft.com/office/drawing/2014/main" id="{2D888562-5B1B-557C-9BFB-8E4E9F6A3319}"/>
               </a:ext>
             </a:extLst>
           </p:cNvPr>
@@ -1270,7 +1270,7 @@
           <p:cNvPr id="6" name="スライド番号プレースホルダー 5">
             <a:extLst>
               <a:ext uri="{FF2B5EF4-FFF2-40B4-BE49-F238E27FC236}">
-                <a16:creationId xmlns:a16="http://schemas.microsoft.com/office/drawing/2014/main" id="{C0FEA0FD-36DA-DD73-6AD0-9BF1EAFC9358}"/>
+                <a16:creationId xmlns:a16="http://schemas.microsoft.com/office/drawing/2014/main" id="{782B3D5A-ED8F-ADDB-044E-3AA6820B8378}"/>
               </a:ext>
             </a:extLst>
           </p:cNvPr>
@@ -1286,7 +1286,7 @@
           <a:bodyPr/>
           <a:lstStyle/>
           <a:p>
-            <a:fld id="{B60B11BF-5DD5-4531-B735-ECDF5ECF92D3}" type="slidenum">
+            <a:fld id="{EF893B2B-97C6-4A98-80C9-AA2D2E6E4430}" type="slidenum">
               <a:rPr kumimoji="1" lang="ja-JP" altLang="en-US" smtClean="0"/>
               <a:t>‹#›</a:t>
             </a:fld>
@@ -1297,7 +1297,7 @@
     </p:spTree>
     <p:extLst>
       <p:ext uri="{BB962C8B-B14F-4D97-AF65-F5344CB8AC3E}">
-        <p14:creationId xmlns:p14="http://schemas.microsoft.com/office/powerpoint/2010/main" val="3445559901"/>
+        <p14:creationId xmlns:p14="http://schemas.microsoft.com/office/powerpoint/2010/main" val="3035639196"/>
       </p:ext>
     </p:extLst>
   </p:cSld>
@@ -1329,7 +1329,7 @@
           <p:cNvPr id="2" name="タイトル 1">
             <a:extLst>
               <a:ext uri="{FF2B5EF4-FFF2-40B4-BE49-F238E27FC236}">
-                <a16:creationId xmlns:a16="http://schemas.microsoft.com/office/drawing/2014/main" id="{1F1B8A50-1F6B-45CF-ACEB-8D67F605E475}"/>
+                <a16:creationId xmlns:a16="http://schemas.microsoft.com/office/drawing/2014/main" id="{3E244899-74B5-490E-ED8B-1F8D6C10A166}"/>
               </a:ext>
             </a:extLst>
           </p:cNvPr>
@@ -1357,7 +1357,7 @@
           <p:cNvPr id="3" name="コンテンツ プレースホルダー 2">
             <a:extLst>
               <a:ext uri="{FF2B5EF4-FFF2-40B4-BE49-F238E27FC236}">
-                <a16:creationId xmlns:a16="http://schemas.microsoft.com/office/drawing/2014/main" id="{C09DF66D-DA1B-4BB5-FB3D-B89835E82464}"/>
+                <a16:creationId xmlns:a16="http://schemas.microsoft.com/office/drawing/2014/main" id="{5B5B6D56-D72E-7113-FC08-452634BB3929}"/>
               </a:ext>
             </a:extLst>
           </p:cNvPr>
@@ -1451,7 +1451,7 @@
           <p:cNvPr id="4" name="コンテンツ プレースホルダー 3">
             <a:extLst>
               <a:ext uri="{FF2B5EF4-FFF2-40B4-BE49-F238E27FC236}">
-                <a16:creationId xmlns:a16="http://schemas.microsoft.com/office/drawing/2014/main" id="{E60C5D0F-EB49-A745-1F84-66E909212DC4}"/>
+                <a16:creationId xmlns:a16="http://schemas.microsoft.com/office/drawing/2014/main" id="{894D69C6-3CEA-BE4B-2379-6986E567ADE8}"/>
               </a:ext>
             </a:extLst>
           </p:cNvPr>
@@ -1545,7 +1545,7 @@
           <p:cNvPr id="5" name="日付プレースホルダー 4">
             <a:extLst>
               <a:ext uri="{FF2B5EF4-FFF2-40B4-BE49-F238E27FC236}">
-                <a16:creationId xmlns:a16="http://schemas.microsoft.com/office/drawing/2014/main" id="{1D6DC9A0-EA43-F6C8-030A-4DF95EFB1592}"/>
+                <a16:creationId xmlns:a16="http://schemas.microsoft.com/office/drawing/2014/main" id="{B89A8924-FEB2-5294-1A3B-661CFDD1C3B6}"/>
               </a:ext>
             </a:extLst>
           </p:cNvPr>
@@ -1561,7 +1561,7 @@
           <a:bodyPr/>
           <a:lstStyle/>
           <a:p>
-            <a:fld id="{F6FFFDC3-8FAB-4C9F-82D1-9E12C85EA6BF}" type="datetimeFigureOut">
+            <a:fld id="{67C56D98-5E46-4070-BB64-A0CF120B6A66}" type="datetimeFigureOut">
               <a:rPr kumimoji="1" lang="ja-JP" altLang="en-US" smtClean="0"/>
               <a:t>2026/7/30</a:t>
             </a:fld>
@@ -1574,7 +1574,7 @@
           <p:cNvPr id="6" name="フッター プレースホルダー 5">
             <a:extLst>
               <a:ext uri="{FF2B5EF4-FFF2-40B4-BE49-F238E27FC236}">
-                <a16:creationId xmlns:a16="http://schemas.microsoft.com/office/drawing/2014/main" id="{A1877FF7-7990-17F2-DBAC-31FBBAFD00D3}"/>
+                <a16:creationId xmlns:a16="http://schemas.microsoft.com/office/drawing/2014/main" id="{DA20A972-0010-A95A-5CBC-7B969362726C}"/>
               </a:ext>
             </a:extLst>
           </p:cNvPr>
@@ -1599,7 +1599,7 @@
           <p:cNvPr id="7" name="スライド番号プレースホルダー 6">
             <a:extLst>
               <a:ext uri="{FF2B5EF4-FFF2-40B4-BE49-F238E27FC236}">
-                <a16:creationId xmlns:a16="http://schemas.microsoft.com/office/drawing/2014/main" id="{82C861FC-7F11-6ED8-DD58-616278D2B2A6}"/>
+                <a16:creationId xmlns:a16="http://schemas.microsoft.com/office/drawing/2014/main" id="{686DDBF2-011E-5277-5344-8BD34FA9DB4F}"/>
               </a:ext>
             </a:extLst>
           </p:cNvPr>
@@ -1615,7 +1615,7 @@
           <a:bodyPr/>
           <a:lstStyle/>
           <a:p>
-            <a:fld id="{B60B11BF-5DD5-4531-B735-ECDF5ECF92D3}" type="slidenum">
+            <a:fld id="{EF893B2B-97C6-4A98-80C9-AA2D2E6E4430}" type="slidenum">
               <a:rPr kumimoji="1" lang="ja-JP" altLang="en-US" smtClean="0"/>
               <a:t>‹#›</a:t>
             </a:fld>
@@ -1626,7 +1626,7 @@
     </p:spTree>
     <p:extLst>
       <p:ext uri="{BB962C8B-B14F-4D97-AF65-F5344CB8AC3E}">
-        <p14:creationId xmlns:p14="http://schemas.microsoft.com/office/powerpoint/2010/main" val="1289900531"/>
+        <p14:creationId xmlns:p14="http://schemas.microsoft.com/office/powerpoint/2010/main" val="233671793"/>
       </p:ext>
     </p:extLst>
   </p:cSld>
@@ -1658,7 +1658,7 @@
           <p:cNvPr id="2" name="タイトル 1">
             <a:extLst>
               <a:ext uri="{FF2B5EF4-FFF2-40B4-BE49-F238E27FC236}">
-                <a16:creationId xmlns:a16="http://schemas.microsoft.com/office/drawing/2014/main" id="{1C97A737-A2FC-3375-B03E-8B919B044BB0}"/>
+                <a16:creationId xmlns:a16="http://schemas.microsoft.com/office/drawing/2014/main" id="{82356D9D-01CB-00B4-CF64-AE09AA53BAFD}"/>
               </a:ext>
             </a:extLst>
           </p:cNvPr>
@@ -1691,7 +1691,7 @@
           <p:cNvPr id="3" name="テキスト プレースホルダー 2">
             <a:extLst>
               <a:ext uri="{FF2B5EF4-FFF2-40B4-BE49-F238E27FC236}">
-                <a16:creationId xmlns:a16="http://schemas.microsoft.com/office/drawing/2014/main" id="{494C0893-BE83-6759-FB6C-536B60F49AE3}"/>
+                <a16:creationId xmlns:a16="http://schemas.microsoft.com/office/drawing/2014/main" id="{D608413A-529B-C189-1900-2A4FB2F14FCC}"/>
               </a:ext>
             </a:extLst>
           </p:cNvPr>
@@ -1762,7 +1762,7 @@
           <p:cNvPr id="4" name="コンテンツ プレースホルダー 3">
             <a:extLst>
               <a:ext uri="{FF2B5EF4-FFF2-40B4-BE49-F238E27FC236}">
-                <a16:creationId xmlns:a16="http://schemas.microsoft.com/office/drawing/2014/main" id="{9CD6304D-C389-4E51-A6C4-A62E62BCE84E}"/>
+                <a16:creationId xmlns:a16="http://schemas.microsoft.com/office/drawing/2014/main" id="{1F641906-0D53-2EF1-758F-96254EDE969C}"/>
               </a:ext>
             </a:extLst>
           </p:cNvPr>
@@ -1856,7 +1856,7 @@
           <p:cNvPr id="5" name="テキスト プレースホルダー 4">
             <a:extLst>
               <a:ext uri="{FF2B5EF4-FFF2-40B4-BE49-F238E27FC236}">
-                <a16:creationId xmlns:a16="http://schemas.microsoft.com/office/drawing/2014/main" id="{3BB80ED9-FF70-4067-8526-060D9FD0C6E2}"/>
+                <a16:creationId xmlns:a16="http://schemas.microsoft.com/office/drawing/2014/main" id="{765F98B0-A292-367E-CF48-ECF80DB846DA}"/>
               </a:ext>
             </a:extLst>
           </p:cNvPr>
@@ -1927,7 +1927,7 @@
           <p:cNvPr id="6" name="コンテンツ プレースホルダー 5">
             <a:extLst>
               <a:ext uri="{FF2B5EF4-FFF2-40B4-BE49-F238E27FC236}">
-                <a16:creationId xmlns:a16="http://schemas.microsoft.com/office/drawing/2014/main" id="{DD591ADD-4DE7-C62F-F224-ACFFB9E8C84A}"/>
+                <a16:creationId xmlns:a16="http://schemas.microsoft.com/office/drawing/2014/main" id="{6D81A11D-A108-5095-3163-AAD71302EC10}"/>
               </a:ext>
             </a:extLst>
           </p:cNvPr>
@@ -2021,7 +2021,7 @@
           <p:cNvPr id="7" name="日付プレースホルダー 6">
             <a:extLst>
               <a:ext uri="{FF2B5EF4-FFF2-40B4-BE49-F238E27FC236}">
-                <a16:creationId xmlns:a16="http://schemas.microsoft.com/office/drawing/2014/main" id="{343D5F17-CF81-9E06-484E-C371B7E6FBD2}"/>
+                <a16:creationId xmlns:a16="http://schemas.microsoft.com/office/drawing/2014/main" id="{B2BAA087-86F1-6A5B-2963-86879788E178}"/>
               </a:ext>
             </a:extLst>
           </p:cNvPr>
@@ -2037,7 +2037,7 @@
           <a:bodyPr/>
           <a:lstStyle/>
           <a:p>
-            <a:fld id="{F6FFFDC3-8FAB-4C9F-82D1-9E12C85EA6BF}" type="datetimeFigureOut">
+            <a:fld id="{67C56D98-5E46-4070-BB64-A0CF120B6A66}" type="datetimeFigureOut">
               <a:rPr kumimoji="1" lang="ja-JP" altLang="en-US" smtClean="0"/>
               <a:t>2026/7/30</a:t>
             </a:fld>
@@ -2050,7 +2050,7 @@
           <p:cNvPr id="8" name="フッター プレースホルダー 7">
             <a:extLst>
               <a:ext uri="{FF2B5EF4-FFF2-40B4-BE49-F238E27FC236}">
-                <a16:creationId xmlns:a16="http://schemas.microsoft.com/office/drawing/2014/main" id="{19CEA047-ED72-8852-9E6F-84BDB96964C1}"/>
+                <a16:creationId xmlns:a16="http://schemas.microsoft.com/office/drawing/2014/main" id="{29E3AF99-8A36-0F5B-05BE-11F398ADDEF9}"/>
               </a:ext>
             </a:extLst>
           </p:cNvPr>
@@ -2075,7 +2075,7 @@
           <p:cNvPr id="9" name="スライド番号プレースホルダー 8">
             <a:extLst>
               <a:ext uri="{FF2B5EF4-FFF2-40B4-BE49-F238E27FC236}">
-                <a16:creationId xmlns:a16="http://schemas.microsoft.com/office/drawing/2014/main" id="{50177CC4-98DB-0569-27F3-2543630C05C0}"/>
+                <a16:creationId xmlns:a16="http://schemas.microsoft.com/office/drawing/2014/main" id="{83881244-D186-AFF6-BE24-AC594435C9EA}"/>
               </a:ext>
             </a:extLst>
           </p:cNvPr>
@@ -2091,7 +2091,7 @@
           <a:bodyPr/>
           <a:lstStyle/>
           <a:p>
-            <a:fld id="{B60B11BF-5DD5-4531-B735-ECDF5ECF92D3}" type="slidenum">
+            <a:fld id="{EF893B2B-97C6-4A98-80C9-AA2D2E6E4430}" type="slidenum">
               <a:rPr kumimoji="1" lang="ja-JP" altLang="en-US" smtClean="0"/>
               <a:t>‹#›</a:t>
             </a:fld>
@@ -2102,7 +2102,7 @@
     </p:spTree>
     <p:extLst>
       <p:ext uri="{BB962C8B-B14F-4D97-AF65-F5344CB8AC3E}">
-        <p14:creationId xmlns:p14="http://schemas.microsoft.com/office/powerpoint/2010/main" val="1019713924"/>
+        <p14:creationId xmlns:p14="http://schemas.microsoft.com/office/powerpoint/2010/main" val="2932010729"/>
       </p:ext>
     </p:extLst>
   </p:cSld>
@@ -2134,7 +2134,7 @@
           <p:cNvPr id="2" name="タイトル 1">
             <a:extLst>
               <a:ext uri="{FF2B5EF4-FFF2-40B4-BE49-F238E27FC236}">
-                <a16:creationId xmlns:a16="http://schemas.microsoft.com/office/drawing/2014/main" id="{DC775E97-BD96-8114-4669-16EE36447B23}"/>
+                <a16:creationId xmlns:a16="http://schemas.microsoft.com/office/drawing/2014/main" id="{718EE321-C0C9-06C7-207A-D66A1CCE7419}"/>
               </a:ext>
             </a:extLst>
           </p:cNvPr>
@@ -2162,7 +2162,7 @@
           <p:cNvPr id="3" name="日付プレースホルダー 2">
             <a:extLst>
               <a:ext uri="{FF2B5EF4-FFF2-40B4-BE49-F238E27FC236}">
-                <a16:creationId xmlns:a16="http://schemas.microsoft.com/office/drawing/2014/main" id="{1BAF886E-6888-2645-A5A6-BCCD8AE1EE75}"/>
+                <a16:creationId xmlns:a16="http://schemas.microsoft.com/office/drawing/2014/main" id="{720EA99F-9B2C-5773-7C8E-AE0AB38246D4}"/>
               </a:ext>
             </a:extLst>
           </p:cNvPr>
@@ -2178,7 +2178,7 @@
           <a:bodyPr/>
           <a:lstStyle/>
           <a:p>
-            <a:fld id="{F6FFFDC3-8FAB-4C9F-82D1-9E12C85EA6BF}" type="datetimeFigureOut">
+            <a:fld id="{67C56D98-5E46-4070-BB64-A0CF120B6A66}" type="datetimeFigureOut">
               <a:rPr kumimoji="1" lang="ja-JP" altLang="en-US" smtClean="0"/>
               <a:t>2026/7/30</a:t>
             </a:fld>
@@ -2191,7 +2191,7 @@
           <p:cNvPr id="4" name="フッター プレースホルダー 3">
             <a:extLst>
               <a:ext uri="{FF2B5EF4-FFF2-40B4-BE49-F238E27FC236}">
-                <a16:creationId xmlns:a16="http://schemas.microsoft.com/office/drawing/2014/main" id="{95D4F8D3-C45D-88B0-3CD5-4D263680E846}"/>
+                <a16:creationId xmlns:a16="http://schemas.microsoft.com/office/drawing/2014/main" id="{6CF526E4-1E14-5DA0-E87E-43CA3D7012E3}"/>
               </a:ext>
             </a:extLst>
           </p:cNvPr>
@@ -2216,7 +2216,7 @@
           <p:cNvPr id="5" name="スライド番号プレースホルダー 4">
             <a:extLst>
               <a:ext uri="{FF2B5EF4-FFF2-40B4-BE49-F238E27FC236}">
-                <a16:creationId xmlns:a16="http://schemas.microsoft.com/office/drawing/2014/main" id="{1F92B885-35DA-D7D0-5EAB-769C03ADC030}"/>
+                <a16:creationId xmlns:a16="http://schemas.microsoft.com/office/drawing/2014/main" id="{3424D52E-1A81-0FDF-06B6-85BDEC70D139}"/>
               </a:ext>
             </a:extLst>
           </p:cNvPr>
@@ -2232,7 +2232,7 @@
           <a:bodyPr/>
           <a:lstStyle/>
           <a:p>
-            <a:fld id="{B60B11BF-5DD5-4531-B735-ECDF5ECF92D3}" type="slidenum">
+            <a:fld id="{EF893B2B-97C6-4A98-80C9-AA2D2E6E4430}" type="slidenum">
               <a:rPr kumimoji="1" lang="ja-JP" altLang="en-US" smtClean="0"/>
               <a:t>‹#›</a:t>
             </a:fld>
@@ -2243,7 +2243,7 @@
     </p:spTree>
     <p:extLst>
       <p:ext uri="{BB962C8B-B14F-4D97-AF65-F5344CB8AC3E}">
-        <p14:creationId xmlns:p14="http://schemas.microsoft.com/office/powerpoint/2010/main" val="1563926192"/>
+        <p14:creationId xmlns:p14="http://schemas.microsoft.com/office/powerpoint/2010/main" val="986131530"/>
       </p:ext>
     </p:extLst>
   </p:cSld>
@@ -2275,7 +2275,7 @@
           <p:cNvPr id="2" name="日付プレースホルダー 1">
             <a:extLst>
               <a:ext uri="{FF2B5EF4-FFF2-40B4-BE49-F238E27FC236}">
-                <a16:creationId xmlns:a16="http://schemas.microsoft.com/office/drawing/2014/main" id="{08E3F86C-02E1-24DD-2883-5CCE025FBDC7}"/>
+                <a16:creationId xmlns:a16="http://schemas.microsoft.com/office/drawing/2014/main" id="{68913CBE-A7FE-1C94-8E0D-C165385E9C48}"/>
               </a:ext>
             </a:extLst>
           </p:cNvPr>
@@ -2291,7 +2291,7 @@
           <a:bodyPr/>
           <a:lstStyle/>
           <a:p>
-            <a:fld id="{F6FFFDC3-8FAB-4C9F-82D1-9E12C85EA6BF}" type="datetimeFigureOut">
+            <a:fld id="{67C56D98-5E46-4070-BB64-A0CF120B6A66}" type="datetimeFigureOut">
               <a:rPr kumimoji="1" lang="ja-JP" altLang="en-US" smtClean="0"/>
               <a:t>2026/7/30</a:t>
             </a:fld>
@@ -2304,7 +2304,7 @@
           <p:cNvPr id="3" name="フッター プレースホルダー 2">
             <a:extLst>
               <a:ext uri="{FF2B5EF4-FFF2-40B4-BE49-F238E27FC236}">
-                <a16:creationId xmlns:a16="http://schemas.microsoft.com/office/drawing/2014/main" id="{B827A758-2C77-8FCD-7092-CC3D21C376B3}"/>
+                <a16:creationId xmlns:a16="http://schemas.microsoft.com/office/drawing/2014/main" id="{4524886E-188B-7148-946C-5FEAEE147811}"/>
               </a:ext>
             </a:extLst>
           </p:cNvPr>
@@ -2329,7 +2329,7 @@
           <p:cNvPr id="4" name="スライド番号プレースホルダー 3">
             <a:extLst>
               <a:ext uri="{FF2B5EF4-FFF2-40B4-BE49-F238E27FC236}">
-                <a16:creationId xmlns:a16="http://schemas.microsoft.com/office/drawing/2014/main" id="{79AECA38-751F-CFB1-C460-6823585AD20D}"/>
+                <a16:creationId xmlns:a16="http://schemas.microsoft.com/office/drawing/2014/main" id="{A26A517E-30C6-9A1F-C62F-5B9C4D2B7F2B}"/>
               </a:ext>
             </a:extLst>
           </p:cNvPr>
@@ -2345,7 +2345,7 @@
           <a:bodyPr/>
           <a:lstStyle/>
           <a:p>
-            <a:fld id="{B60B11BF-5DD5-4531-B735-ECDF5ECF92D3}" type="slidenum">
+            <a:fld id="{EF893B2B-97C6-4A98-80C9-AA2D2E6E4430}" type="slidenum">
               <a:rPr kumimoji="1" lang="ja-JP" altLang="en-US" smtClean="0"/>
               <a:t>‹#›</a:t>
             </a:fld>
@@ -2356,7 +2356,7 @@
     </p:spTree>
     <p:extLst>
       <p:ext uri="{BB962C8B-B14F-4D97-AF65-F5344CB8AC3E}">
-        <p14:creationId xmlns:p14="http://schemas.microsoft.com/office/powerpoint/2010/main" val="734683391"/>
+        <p14:creationId xmlns:p14="http://schemas.microsoft.com/office/powerpoint/2010/main" val="228421457"/>
       </p:ext>
     </p:extLst>
   </p:cSld>
@@ -2388,7 +2388,7 @@
           <p:cNvPr id="2" name="タイトル 1">
             <a:extLst>
               <a:ext uri="{FF2B5EF4-FFF2-40B4-BE49-F238E27FC236}">
-                <a16:creationId xmlns:a16="http://schemas.microsoft.com/office/drawing/2014/main" id="{EC293D5E-7292-69BC-AD46-C6025196FA9E}"/>
+                <a16:creationId xmlns:a16="http://schemas.microsoft.com/office/drawing/2014/main" id="{ACC82CFA-C837-0642-9D0A-765B93D5206C}"/>
               </a:ext>
             </a:extLst>
           </p:cNvPr>
@@ -2425,7 +2425,7 @@
           <p:cNvPr id="3" name="コンテンツ プレースホルダー 2">
             <a:extLst>
               <a:ext uri="{FF2B5EF4-FFF2-40B4-BE49-F238E27FC236}">
-                <a16:creationId xmlns:a16="http://schemas.microsoft.com/office/drawing/2014/main" id="{207C94DD-1D5B-474F-CF63-4509D4D3CEF0}"/>
+                <a16:creationId xmlns:a16="http://schemas.microsoft.com/office/drawing/2014/main" id="{25FAB090-E286-076F-5FC6-DB3023CA09D6}"/>
               </a:ext>
             </a:extLst>
           </p:cNvPr>
@@ -2547,7 +2547,7 @@
           <p:cNvPr id="4" name="テキスト プレースホルダー 3">
             <a:extLst>
               <a:ext uri="{FF2B5EF4-FFF2-40B4-BE49-F238E27FC236}">
-                <a16:creationId xmlns:a16="http://schemas.microsoft.com/office/drawing/2014/main" id="{AA7E566A-76ED-2037-D4C1-4B4BDD59D925}"/>
+                <a16:creationId xmlns:a16="http://schemas.microsoft.com/office/drawing/2014/main" id="{8BEDE0A4-E676-DF1C-0D6D-C494DA273DB3}"/>
               </a:ext>
             </a:extLst>
           </p:cNvPr>
@@ -2618,7 +2618,7 @@
           <p:cNvPr id="5" name="日付プレースホルダー 4">
             <a:extLst>
               <a:ext uri="{FF2B5EF4-FFF2-40B4-BE49-F238E27FC236}">
-                <a16:creationId xmlns:a16="http://schemas.microsoft.com/office/drawing/2014/main" id="{BE4CF398-4468-7DB3-FFA8-3472208A9A5F}"/>
+                <a16:creationId xmlns:a16="http://schemas.microsoft.com/office/drawing/2014/main" id="{6F0E55F4-B2DA-BAD8-0823-870193BB1E06}"/>
               </a:ext>
             </a:extLst>
           </p:cNvPr>
@@ -2634,7 +2634,7 @@
           <a:bodyPr/>
           <a:lstStyle/>
           <a:p>
-            <a:fld id="{F6FFFDC3-8FAB-4C9F-82D1-9E12C85EA6BF}" type="datetimeFigureOut">
+            <a:fld id="{67C56D98-5E46-4070-BB64-A0CF120B6A66}" type="datetimeFigureOut">
               <a:rPr kumimoji="1" lang="ja-JP" altLang="en-US" smtClean="0"/>
               <a:t>2026/7/30</a:t>
             </a:fld>
@@ -2647,7 +2647,7 @@
           <p:cNvPr id="6" name="フッター プレースホルダー 5">
             <a:extLst>
               <a:ext uri="{FF2B5EF4-FFF2-40B4-BE49-F238E27FC236}">
-                <a16:creationId xmlns:a16="http://schemas.microsoft.com/office/drawing/2014/main" id="{635A0A2B-C72D-0FCA-D674-205FB7DDEEF4}"/>
+                <a16:creationId xmlns:a16="http://schemas.microsoft.com/office/drawing/2014/main" id="{ED06DCE5-5235-E77B-F125-1CED5A14D63E}"/>
               </a:ext>
             </a:extLst>
           </p:cNvPr>
@@ -2672,7 +2672,7 @@
           <p:cNvPr id="7" name="スライド番号プレースホルダー 6">
             <a:extLst>
               <a:ext uri="{FF2B5EF4-FFF2-40B4-BE49-F238E27FC236}">
-                <a16:creationId xmlns:a16="http://schemas.microsoft.com/office/drawing/2014/main" id="{52233C4F-0815-FB53-B94A-13D9C5D30F93}"/>
+                <a16:creationId xmlns:a16="http://schemas.microsoft.com/office/drawing/2014/main" id="{071679B4-AF43-AE72-B4FF-8A770DF827FA}"/>
               </a:ext>
             </a:extLst>
           </p:cNvPr>
@@ -2688,7 +2688,7 @@
           <a:bodyPr/>
           <a:lstStyle/>
           <a:p>
-            <a:fld id="{B60B11BF-5DD5-4531-B735-ECDF5ECF92D3}" type="slidenum">
+            <a:fld id="{EF893B2B-97C6-4A98-80C9-AA2D2E6E4430}" type="slidenum">
               <a:rPr kumimoji="1" lang="ja-JP" altLang="en-US" smtClean="0"/>
               <a:t>‹#›</a:t>
             </a:fld>
@@ -2699,7 +2699,7 @@
     </p:spTree>
     <p:extLst>
       <p:ext uri="{BB962C8B-B14F-4D97-AF65-F5344CB8AC3E}">
-        <p14:creationId xmlns:p14="http://schemas.microsoft.com/office/powerpoint/2010/main" val="3172569537"/>
+        <p14:creationId xmlns:p14="http://schemas.microsoft.com/office/powerpoint/2010/main" val="2182693286"/>
       </p:ext>
     </p:extLst>
   </p:cSld>
@@ -2731,7 +2731,7 @@
           <p:cNvPr id="2" name="タイトル 1">
             <a:extLst>
               <a:ext uri="{FF2B5EF4-FFF2-40B4-BE49-F238E27FC236}">
-                <a16:creationId xmlns:a16="http://schemas.microsoft.com/office/drawing/2014/main" id="{D7DB21CB-209C-0BE4-8746-ADB449444682}"/>
+                <a16:creationId xmlns:a16="http://schemas.microsoft.com/office/drawing/2014/main" id="{9D091EDA-8535-583C-4A6F-86A6509DA50E}"/>
               </a:ext>
             </a:extLst>
           </p:cNvPr>
@@ -2768,7 +2768,7 @@
           <p:cNvPr id="3" name="図プレースホルダー 2">
             <a:extLst>
               <a:ext uri="{FF2B5EF4-FFF2-40B4-BE49-F238E27FC236}">
-                <a16:creationId xmlns:a16="http://schemas.microsoft.com/office/drawing/2014/main" id="{FF3985A4-6DD1-233E-EB29-77737DC60435}"/>
+                <a16:creationId xmlns:a16="http://schemas.microsoft.com/office/drawing/2014/main" id="{0C8221FE-99DF-E9B3-D912-E7FA28D78599}"/>
               </a:ext>
             </a:extLst>
           </p:cNvPr>
@@ -2835,7 +2835,7 @@
           <p:cNvPr id="4" name="テキスト プレースホルダー 3">
             <a:extLst>
               <a:ext uri="{FF2B5EF4-FFF2-40B4-BE49-F238E27FC236}">
-                <a16:creationId xmlns:a16="http://schemas.microsoft.com/office/drawing/2014/main" id="{7FC70C0C-3D25-D30B-6EAD-DFE0B791A33F}"/>
+                <a16:creationId xmlns:a16="http://schemas.microsoft.com/office/drawing/2014/main" id="{E6417307-A0DD-E052-6E2F-FED07DAC965D}"/>
               </a:ext>
             </a:extLst>
           </p:cNvPr>
@@ -2906,7 +2906,7 @@
           <p:cNvPr id="5" name="日付プレースホルダー 4">
             <a:extLst>
               <a:ext uri="{FF2B5EF4-FFF2-40B4-BE49-F238E27FC236}">
-                <a16:creationId xmlns:a16="http://schemas.microsoft.com/office/drawing/2014/main" id="{189AD132-362F-8C77-1A92-BF0FF623CFAE}"/>
+                <a16:creationId xmlns:a16="http://schemas.microsoft.com/office/drawing/2014/main" id="{9B9E6BA1-29C7-8BF9-BF1A-58EC2E18940D}"/>
               </a:ext>
             </a:extLst>
           </p:cNvPr>
@@ -2922,7 +2922,7 @@
           <a:bodyPr/>
           <a:lstStyle/>
           <a:p>
-            <a:fld id="{F6FFFDC3-8FAB-4C9F-82D1-9E12C85EA6BF}" type="datetimeFigureOut">
+            <a:fld id="{67C56D98-5E46-4070-BB64-A0CF120B6A66}" type="datetimeFigureOut">
               <a:rPr kumimoji="1" lang="ja-JP" altLang="en-US" smtClean="0"/>
               <a:t>2026/7/30</a:t>
             </a:fld>
@@ -2935,7 +2935,7 @@
           <p:cNvPr id="6" name="フッター プレースホルダー 5">
             <a:extLst>
               <a:ext uri="{FF2B5EF4-FFF2-40B4-BE49-F238E27FC236}">
-                <a16:creationId xmlns:a16="http://schemas.microsoft.com/office/drawing/2014/main" id="{5DC6395C-8924-DED6-E701-7D3A18E508B3}"/>
+                <a16:creationId xmlns:a16="http://schemas.microsoft.com/office/drawing/2014/main" id="{C59C70A0-1035-94BC-4FCB-B5B386B21F18}"/>
               </a:ext>
             </a:extLst>
           </p:cNvPr>
@@ -2960,7 +2960,7 @@
           <p:cNvPr id="7" name="スライド番号プレースホルダー 6">
             <a:extLst>
               <a:ext uri="{FF2B5EF4-FFF2-40B4-BE49-F238E27FC236}">
-                <a16:creationId xmlns:a16="http://schemas.microsoft.com/office/drawing/2014/main" id="{255F7028-D1D0-7BFA-721E-B639F0EBDA3F}"/>
+                <a16:creationId xmlns:a16="http://schemas.microsoft.com/office/drawing/2014/main" id="{91151673-297A-7FBD-ABA1-04EB986CEE3F}"/>
               </a:ext>
             </a:extLst>
           </p:cNvPr>
@@ -2976,7 +2976,7 @@
           <a:bodyPr/>
           <a:lstStyle/>
           <a:p>
-            <a:fld id="{B60B11BF-5DD5-4531-B735-ECDF5ECF92D3}" type="slidenum">
+            <a:fld id="{EF893B2B-97C6-4A98-80C9-AA2D2E6E4430}" type="slidenum">
               <a:rPr kumimoji="1" lang="ja-JP" altLang="en-US" smtClean="0"/>
               <a:t>‹#›</a:t>
             </a:fld>
@@ -2987,7 +2987,7 @@
     </p:spTree>
     <p:extLst>
       <p:ext uri="{BB962C8B-B14F-4D97-AF65-F5344CB8AC3E}">
-        <p14:creationId xmlns:p14="http://schemas.microsoft.com/office/powerpoint/2010/main" val="2271128719"/>
+        <p14:creationId xmlns:p14="http://schemas.microsoft.com/office/powerpoint/2010/main" val="3878226956"/>
       </p:ext>
     </p:extLst>
   </p:cSld>
@@ -3024,7 +3024,7 @@
           <p:cNvPr id="2" name="タイトル プレースホルダー 1">
             <a:extLst>
               <a:ext uri="{FF2B5EF4-FFF2-40B4-BE49-F238E27FC236}">
-                <a16:creationId xmlns:a16="http://schemas.microsoft.com/office/drawing/2014/main" id="{A72133A0-A21F-070E-9F6B-695BE230CAC7}"/>
+                <a16:creationId xmlns:a16="http://schemas.microsoft.com/office/drawing/2014/main" id="{8CACDDAB-6F09-2EA7-5511-9519E642709F}"/>
               </a:ext>
             </a:extLst>
           </p:cNvPr>
@@ -3062,7 +3062,7 @@
           <p:cNvPr id="3" name="テキスト プレースホルダー 2">
             <a:extLst>
               <a:ext uri="{FF2B5EF4-FFF2-40B4-BE49-F238E27FC236}">
-                <a16:creationId xmlns:a16="http://schemas.microsoft.com/office/drawing/2014/main" id="{0A66CD53-3390-C9F8-CCA4-0B0E9CBA43D1}"/>
+                <a16:creationId xmlns:a16="http://schemas.microsoft.com/office/drawing/2014/main" id="{D5932DC2-ABB5-C516-D2CB-212361266B88}"/>
               </a:ext>
             </a:extLst>
           </p:cNvPr>
@@ -3161,7 +3161,7 @@
           <p:cNvPr id="4" name="日付プレースホルダー 3">
             <a:extLst>
               <a:ext uri="{FF2B5EF4-FFF2-40B4-BE49-F238E27FC236}">
-                <a16:creationId xmlns:a16="http://schemas.microsoft.com/office/drawing/2014/main" id="{470F6993-B43D-6CF4-5DAC-1D14FCE33E3F}"/>
+                <a16:creationId xmlns:a16="http://schemas.microsoft.com/office/drawing/2014/main" id="{38F73F0B-E23D-393C-3557-21939D690EC9}"/>
               </a:ext>
             </a:extLst>
           </p:cNvPr>
@@ -3195,7 +3195,7 @@
             </a:lvl1pPr>
           </a:lstStyle>
           <a:p>
-            <a:fld id="{F6FFFDC3-8FAB-4C9F-82D1-9E12C85EA6BF}" type="datetimeFigureOut">
+            <a:fld id="{67C56D98-5E46-4070-BB64-A0CF120B6A66}" type="datetimeFigureOut">
               <a:rPr kumimoji="1" lang="ja-JP" altLang="en-US" smtClean="0"/>
               <a:t>2026/7/30</a:t>
             </a:fld>
@@ -3208,7 +3208,7 @@
           <p:cNvPr id="5" name="フッター プレースホルダー 4">
             <a:extLst>
               <a:ext uri="{FF2B5EF4-FFF2-40B4-BE49-F238E27FC236}">
-                <a16:creationId xmlns:a16="http://schemas.microsoft.com/office/drawing/2014/main" id="{81773E31-CB19-5E41-4120-AD017CEC1FC7}"/>
+                <a16:creationId xmlns:a16="http://schemas.microsoft.com/office/drawing/2014/main" id="{B26BD24A-64E2-51D9-EB1B-927AAF88A73D}"/>
               </a:ext>
             </a:extLst>
           </p:cNvPr>
@@ -3251,7 +3251,7 @@
           <p:cNvPr id="6" name="スライド番号プレースホルダー 5">
             <a:extLst>
               <a:ext uri="{FF2B5EF4-FFF2-40B4-BE49-F238E27FC236}">
-                <a16:creationId xmlns:a16="http://schemas.microsoft.com/office/drawing/2014/main" id="{E0165ACC-6E9B-5BFE-B8C5-63DA49367E0A}"/>
+                <a16:creationId xmlns:a16="http://schemas.microsoft.com/office/drawing/2014/main" id="{8774EFB7-C04A-592E-2FE5-9F679079A3F3}"/>
               </a:ext>
             </a:extLst>
           </p:cNvPr>
@@ -3285,7 +3285,7 @@
             </a:lvl1pPr>
           </a:lstStyle>
           <a:p>
-            <a:fld id="{B60B11BF-5DD5-4531-B735-ECDF5ECF92D3}" type="slidenum">
+            <a:fld id="{EF893B2B-97C6-4A98-80C9-AA2D2E6E4430}" type="slidenum">
               <a:rPr kumimoji="1" lang="ja-JP" altLang="en-US" smtClean="0"/>
               <a:t>‹#›</a:t>
             </a:fld>
@@ -3296,7 +3296,7 @@
     </p:spTree>
     <p:extLst>
       <p:ext uri="{BB962C8B-B14F-4D97-AF65-F5344CB8AC3E}">
-        <p14:creationId xmlns:p14="http://schemas.microsoft.com/office/powerpoint/2010/main" val="3636085843"/>
+        <p14:creationId xmlns:p14="http://schemas.microsoft.com/office/powerpoint/2010/main" val="1401297621"/>
       </p:ext>
     </p:extLst>
   </p:cSld>
@@ -3619,7 +3619,7 @@
           <p:cNvPr id="2" name="テキスト ボックス 1">
             <a:extLst>
               <a:ext uri="{FF2B5EF4-FFF2-40B4-BE49-F238E27FC236}">
-                <a16:creationId xmlns:a16="http://schemas.microsoft.com/office/drawing/2014/main" id="{0CE6F4F5-D286-10F7-75B7-63EA6DA1308C}"/>
+                <a16:creationId xmlns:a16="http://schemas.microsoft.com/office/drawing/2014/main" id="{3982AFE5-FC40-2842-D8C0-7E6973CD59C0}"/>
               </a:ext>
             </a:extLst>
           </p:cNvPr>
@@ -3665,7 +3665,7 @@
           <p:cNvPr id="3" name="テキスト ボックス 2">
             <a:extLst>
               <a:ext uri="{FF2B5EF4-FFF2-40B4-BE49-F238E27FC236}">
-                <a16:creationId xmlns:a16="http://schemas.microsoft.com/office/drawing/2014/main" id="{B349AA97-0BCC-D58A-16B6-0C2AEF3E74CA}"/>
+                <a16:creationId xmlns:a16="http://schemas.microsoft.com/office/drawing/2014/main" id="{52997323-8759-A82E-12B2-2AEA2396C231}"/>
               </a:ext>
             </a:extLst>
           </p:cNvPr>
@@ -3714,7 +3714,7 @@
           <p:cNvPr id="4" name="テキスト ボックス 3">
             <a:extLst>
               <a:ext uri="{FF2B5EF4-FFF2-40B4-BE49-F238E27FC236}">
-                <a16:creationId xmlns:a16="http://schemas.microsoft.com/office/drawing/2014/main" id="{90E1995D-E9BB-E304-625B-8D6AAE5E9369}"/>
+                <a16:creationId xmlns:a16="http://schemas.microsoft.com/office/drawing/2014/main" id="{BBD268FB-DA47-CE72-82E0-ACCD60B9DD7A}"/>
               </a:ext>
             </a:extLst>
           </p:cNvPr>
@@ -3754,7 +3754,7 @@
           <p:cNvPr id="5" name="テキスト ボックス 4">
             <a:extLst>
               <a:ext uri="{FF2B5EF4-FFF2-40B4-BE49-F238E27FC236}">
-                <a16:creationId xmlns:a16="http://schemas.microsoft.com/office/drawing/2014/main" id="{9942A085-0E2C-1B52-F400-E07D4ED6DE93}"/>
+                <a16:creationId xmlns:a16="http://schemas.microsoft.com/office/drawing/2014/main" id="{EECC02B9-1DBB-0679-5B31-14DD04E9308C}"/>
               </a:ext>
             </a:extLst>
           </p:cNvPr>
@@ -3801,7 +3801,7 @@
             <a:hlinkClick r:id="" action="ppaction://media"/>
             <a:extLst>
               <a:ext uri="{FF2B5EF4-FFF2-40B4-BE49-F238E27FC236}">
-                <a16:creationId xmlns:a16="http://schemas.microsoft.com/office/drawing/2014/main" id="{83071BD7-E9D4-FCE9-BC90-5FF09991A24C}"/>
+                <a16:creationId xmlns:a16="http://schemas.microsoft.com/office/drawing/2014/main" id="{C33722AC-8061-F938-468B-BAB4666E35AD}"/>
               </a:ext>
             </a:extLst>
           </p:cNvPr>
@@ -3836,7 +3836,7 @@
     </p:spTree>
     <p:extLst>
       <p:ext uri="{BB962C8B-B14F-4D97-AF65-F5344CB8AC3E}">
-        <p14:creationId xmlns:p14="http://schemas.microsoft.com/office/powerpoint/2010/main" val="4097172312"/>
+        <p14:creationId xmlns:p14="http://schemas.microsoft.com/office/powerpoint/2010/main" val="4173151483"/>
       </p:ext>
     </p:extLst>
   </p:cSld>
@@ -3960,7 +3960,7 @@
           <p:cNvPr id="2" name="テキスト ボックス 1">
             <a:extLst>
               <a:ext uri="{FF2B5EF4-FFF2-40B4-BE49-F238E27FC236}">
-                <a16:creationId xmlns:a16="http://schemas.microsoft.com/office/drawing/2014/main" id="{40E42FE7-3979-0B3B-FC0E-F3E79DA4F2DF}"/>
+                <a16:creationId xmlns:a16="http://schemas.microsoft.com/office/drawing/2014/main" id="{B8EDD470-67BE-5CA3-199E-BB9301F22758}"/>
               </a:ext>
             </a:extLst>
           </p:cNvPr>
@@ -4006,7 +4006,7 @@
           <p:cNvPr id="3" name="テキスト ボックス 2">
             <a:extLst>
               <a:ext uri="{FF2B5EF4-FFF2-40B4-BE49-F238E27FC236}">
-                <a16:creationId xmlns:a16="http://schemas.microsoft.com/office/drawing/2014/main" id="{71C92DBA-EAD8-9049-F432-C8AB40A6C3CB}"/>
+                <a16:creationId xmlns:a16="http://schemas.microsoft.com/office/drawing/2014/main" id="{C08B2F78-E0C8-790A-C686-26013CF95328}"/>
               </a:ext>
             </a:extLst>
           </p:cNvPr>
@@ -4046,7 +4046,7 @@
           <p:cNvPr id="4" name="テキスト ボックス 3">
             <a:extLst>
               <a:ext uri="{FF2B5EF4-FFF2-40B4-BE49-F238E27FC236}">
-                <a16:creationId xmlns:a16="http://schemas.microsoft.com/office/drawing/2014/main" id="{55D1A63F-BC06-15A4-E5ED-00319132CFD8}"/>
+                <a16:creationId xmlns:a16="http://schemas.microsoft.com/office/drawing/2014/main" id="{DAAD3A7A-BC8F-7A1C-CD38-EDF4C0C9FD42}"/>
               </a:ext>
             </a:extLst>
           </p:cNvPr>
@@ -4076,14 +4076,17 @@
                 </a:solidFill>
                 <a:latin typeface="Arial" panose="020B0604020202020204" pitchFamily="34" charset="0"/>
               </a:rPr>
-              <a:t>About Laravel Laravel is a web application framework with expressive, elegant syntax</a:t>
-            </a:r>
-            <a:endParaRPr kumimoji="1" lang="ja-JP" altLang="en-US" sz="2000">
-              <a:solidFill>
-                <a:srgbClr val="333333"/>
-              </a:solidFill>
-              <a:latin typeface="Arial" panose="020B0604020202020204" pitchFamily="34" charset="0"/>
-            </a:endParaRPr>
+              <a:t>Foodtruck Map</a:t>
+            </a:r>
+            <a:r>
+              <a:rPr kumimoji="1" lang="ja-JP" altLang="en-US" sz="2000">
+                <a:solidFill>
+                  <a:srgbClr val="333333"/>
+                </a:solidFill>
+                <a:latin typeface="Arial" panose="020B0604020202020204" pitchFamily="34" charset="0"/>
+              </a:rPr>
+              <a:t>の目的、構成、実装を公開コードから確認できるプロジェクトです。</a:t>
+            </a:r>
           </a:p>
         </p:txBody>
       </p:sp>
@@ -4092,7 +4095,7 @@
           <p:cNvPr id="5" name="テキスト ボックス 4">
             <a:extLst>
               <a:ext uri="{FF2B5EF4-FFF2-40B4-BE49-F238E27FC236}">
-                <a16:creationId xmlns:a16="http://schemas.microsoft.com/office/drawing/2014/main" id="{02B127B6-1F9C-30E0-4FE4-4E6F0B835CEF}"/>
+                <a16:creationId xmlns:a16="http://schemas.microsoft.com/office/drawing/2014/main" id="{81792C61-6C37-931C-2FE5-0FA781762E13}"/>
               </a:ext>
             </a:extLst>
           </p:cNvPr>
@@ -4139,7 +4142,7 @@
             <a:hlinkClick r:id="" action="ppaction://media"/>
             <a:extLst>
               <a:ext uri="{FF2B5EF4-FFF2-40B4-BE49-F238E27FC236}">
-                <a16:creationId xmlns:a16="http://schemas.microsoft.com/office/drawing/2014/main" id="{4C0F9BF2-0D63-C812-941A-AA3C259073B8}"/>
+                <a16:creationId xmlns:a16="http://schemas.microsoft.com/office/drawing/2014/main" id="{72D5341B-06B6-306A-89F3-2E5C678729FB}"/>
               </a:ext>
             </a:extLst>
           </p:cNvPr>
@@ -4174,7 +4177,7 @@
     </p:spTree>
     <p:extLst>
       <p:ext uri="{BB962C8B-B14F-4D97-AF65-F5344CB8AC3E}">
-        <p14:creationId xmlns:p14="http://schemas.microsoft.com/office/powerpoint/2010/main" val="1992904018"/>
+        <p14:creationId xmlns:p14="http://schemas.microsoft.com/office/powerpoint/2010/main" val="3373700912"/>
       </p:ext>
     </p:extLst>
   </p:cSld>
@@ -4217,7 +4220,7 @@
                                   <p:childTnLst>
                                     <p:cmd type="call" cmd="playFrom(0.0)">
                                       <p:cBhvr>
-                                        <p:cTn id="6" dur="7780" fill="hold"/>
+                                        <p:cTn id="6" dur="7341" fill="hold"/>
                                         <p:tgtEl>
                                           <p:spTgt spid="6"/>
                                         </p:tgtEl>
@@ -4298,7 +4301,7 @@
           <p:cNvPr id="2" name="テキスト ボックス 1">
             <a:extLst>
               <a:ext uri="{FF2B5EF4-FFF2-40B4-BE49-F238E27FC236}">
-                <a16:creationId xmlns:a16="http://schemas.microsoft.com/office/drawing/2014/main" id="{A0575515-8932-6156-4D7D-52F125C56EE6}"/>
+                <a16:creationId xmlns:a16="http://schemas.microsoft.com/office/drawing/2014/main" id="{00BD61BB-251A-C301-E336-5035E4B9DDDE}"/>
               </a:ext>
             </a:extLst>
           </p:cNvPr>
@@ -4344,7 +4347,7 @@
           <p:cNvPr id="3" name="テキスト ボックス 2">
             <a:extLst>
               <a:ext uri="{FF2B5EF4-FFF2-40B4-BE49-F238E27FC236}">
-                <a16:creationId xmlns:a16="http://schemas.microsoft.com/office/drawing/2014/main" id="{67565A6A-5E7B-36C8-3260-074AF4D5D755}"/>
+                <a16:creationId xmlns:a16="http://schemas.microsoft.com/office/drawing/2014/main" id="{466548FF-A073-21BC-FED9-6D6A32158276}"/>
               </a:ext>
             </a:extLst>
           </p:cNvPr>
@@ -4384,7 +4387,7 @@
           <p:cNvPr id="4" name="テキスト ボックス 3">
             <a:extLst>
               <a:ext uri="{FF2B5EF4-FFF2-40B4-BE49-F238E27FC236}">
-                <a16:creationId xmlns:a16="http://schemas.microsoft.com/office/drawing/2014/main" id="{2F5EF14D-FF3B-8F4D-4FF0-77F9C4B5D7AD}"/>
+                <a16:creationId xmlns:a16="http://schemas.microsoft.com/office/drawing/2014/main" id="{F512B2FC-B106-5D94-4894-7CEE0345FA12}"/>
               </a:ext>
             </a:extLst>
           </p:cNvPr>
@@ -4497,7 +4500,7 @@
           <p:cNvPr id="5" name="テキスト ボックス 4">
             <a:extLst>
               <a:ext uri="{FF2B5EF4-FFF2-40B4-BE49-F238E27FC236}">
-                <a16:creationId xmlns:a16="http://schemas.microsoft.com/office/drawing/2014/main" id="{5BC3B13C-EA24-5D69-DAE9-F28A5E004731}"/>
+                <a16:creationId xmlns:a16="http://schemas.microsoft.com/office/drawing/2014/main" id="{1A14582E-D3FE-720D-3BD2-D2324E3272DD}"/>
               </a:ext>
             </a:extLst>
           </p:cNvPr>
@@ -4544,7 +4547,7 @@
             <a:hlinkClick r:id="" action="ppaction://media"/>
             <a:extLst>
               <a:ext uri="{FF2B5EF4-FFF2-40B4-BE49-F238E27FC236}">
-                <a16:creationId xmlns:a16="http://schemas.microsoft.com/office/drawing/2014/main" id="{F695EB64-C1A2-D708-BA32-50F4C4FCB443}"/>
+                <a16:creationId xmlns:a16="http://schemas.microsoft.com/office/drawing/2014/main" id="{93208A96-E1CD-C08A-294A-6862CC80D3E8}"/>
               </a:ext>
             </a:extLst>
           </p:cNvPr>
@@ -4579,7 +4582,7 @@
     </p:spTree>
     <p:extLst>
       <p:ext uri="{BB962C8B-B14F-4D97-AF65-F5344CB8AC3E}">
-        <p14:creationId xmlns:p14="http://schemas.microsoft.com/office/powerpoint/2010/main" val="650421520"/>
+        <p14:creationId xmlns:p14="http://schemas.microsoft.com/office/powerpoint/2010/main" val="3147410472"/>
       </p:ext>
     </p:extLst>
   </p:cSld>
@@ -4703,7 +4706,7 @@
           <p:cNvPr id="2" name="テキスト ボックス 1">
             <a:extLst>
               <a:ext uri="{FF2B5EF4-FFF2-40B4-BE49-F238E27FC236}">
-                <a16:creationId xmlns:a16="http://schemas.microsoft.com/office/drawing/2014/main" id="{019ED71A-4F86-A0FD-7D3E-298004B0CC91}"/>
+                <a16:creationId xmlns:a16="http://schemas.microsoft.com/office/drawing/2014/main" id="{2618D972-8790-0C8C-8971-A8863D69F5D4}"/>
               </a:ext>
             </a:extLst>
           </p:cNvPr>
@@ -4749,7 +4752,7 @@
           <p:cNvPr id="3" name="テキスト ボックス 2">
             <a:extLst>
               <a:ext uri="{FF2B5EF4-FFF2-40B4-BE49-F238E27FC236}">
-                <a16:creationId xmlns:a16="http://schemas.microsoft.com/office/drawing/2014/main" id="{4E006BA5-2388-940E-6320-8E6BB6A2A16C}"/>
+                <a16:creationId xmlns:a16="http://schemas.microsoft.com/office/drawing/2014/main" id="{A9C21BF1-CA66-536F-24F7-97D873F8CEEC}"/>
               </a:ext>
             </a:extLst>
           </p:cNvPr>
@@ -4789,7 +4792,7 @@
           <p:cNvPr id="4" name="テキスト ボックス 3">
             <a:extLst>
               <a:ext uri="{FF2B5EF4-FFF2-40B4-BE49-F238E27FC236}">
-                <a16:creationId xmlns:a16="http://schemas.microsoft.com/office/drawing/2014/main" id="{10D6E730-7EE4-389D-D19E-62894843831A}"/>
+                <a16:creationId xmlns:a16="http://schemas.microsoft.com/office/drawing/2014/main" id="{C1C6C1BC-3900-F899-A646-AF40D7A233BC}"/>
               </a:ext>
             </a:extLst>
           </p:cNvPr>
@@ -4899,7 +4902,7 @@
           <p:cNvPr id="5" name="テキスト ボックス 4">
             <a:extLst>
               <a:ext uri="{FF2B5EF4-FFF2-40B4-BE49-F238E27FC236}">
-                <a16:creationId xmlns:a16="http://schemas.microsoft.com/office/drawing/2014/main" id="{53398374-009E-C855-120E-38C070268478}"/>
+                <a16:creationId xmlns:a16="http://schemas.microsoft.com/office/drawing/2014/main" id="{373E2AFE-44E8-59ED-CB96-3B7737F9A905}"/>
               </a:ext>
             </a:extLst>
           </p:cNvPr>
@@ -4946,7 +4949,7 @@
             <a:hlinkClick r:id="" action="ppaction://media"/>
             <a:extLst>
               <a:ext uri="{FF2B5EF4-FFF2-40B4-BE49-F238E27FC236}">
-                <a16:creationId xmlns:a16="http://schemas.microsoft.com/office/drawing/2014/main" id="{89D03862-8D0F-EF00-53E3-4DA8C5059336}"/>
+                <a16:creationId xmlns:a16="http://schemas.microsoft.com/office/drawing/2014/main" id="{CA13679F-A856-FC32-F869-9957415A37BD}"/>
               </a:ext>
             </a:extLst>
           </p:cNvPr>
@@ -4981,7 +4984,7 @@
     </p:spTree>
     <p:extLst>
       <p:ext uri="{BB962C8B-B14F-4D97-AF65-F5344CB8AC3E}">
-        <p14:creationId xmlns:p14="http://schemas.microsoft.com/office/powerpoint/2010/main" val="425876237"/>
+        <p14:creationId xmlns:p14="http://schemas.microsoft.com/office/powerpoint/2010/main" val="2840963360"/>
       </p:ext>
     </p:extLst>
   </p:cSld>
@@ -5105,7 +5108,7 @@
           <p:cNvPr id="2" name="テキスト ボックス 1">
             <a:extLst>
               <a:ext uri="{FF2B5EF4-FFF2-40B4-BE49-F238E27FC236}">
-                <a16:creationId xmlns:a16="http://schemas.microsoft.com/office/drawing/2014/main" id="{87824746-FBF9-61C1-7EE7-4C9689FE8B8A}"/>
+                <a16:creationId xmlns:a16="http://schemas.microsoft.com/office/drawing/2014/main" id="{783691C7-3409-040C-ECDF-852B0DCE02D4}"/>
               </a:ext>
             </a:extLst>
           </p:cNvPr>
@@ -5151,7 +5154,7 @@
           <p:cNvPr id="3" name="テキスト ボックス 2">
             <a:extLst>
               <a:ext uri="{FF2B5EF4-FFF2-40B4-BE49-F238E27FC236}">
-                <a16:creationId xmlns:a16="http://schemas.microsoft.com/office/drawing/2014/main" id="{F3FEC3F8-148F-0BFF-2B3A-89DD25BDDFF5}"/>
+                <a16:creationId xmlns:a16="http://schemas.microsoft.com/office/drawing/2014/main" id="{B834CAAF-C7C4-B319-9183-3F6CE5DBAECF}"/>
               </a:ext>
             </a:extLst>
           </p:cNvPr>
@@ -5191,7 +5194,7 @@
           <p:cNvPr id="4" name="テキスト ボックス 3">
             <a:extLst>
               <a:ext uri="{FF2B5EF4-FFF2-40B4-BE49-F238E27FC236}">
-                <a16:creationId xmlns:a16="http://schemas.microsoft.com/office/drawing/2014/main" id="{0FA81CB2-3DA0-B894-657B-141D1648FDC6}"/>
+                <a16:creationId xmlns:a16="http://schemas.microsoft.com/office/drawing/2014/main" id="{44B3941C-E63B-C977-A3F1-704B546F8CC3}"/>
               </a:ext>
             </a:extLst>
           </p:cNvPr>
@@ -5221,25 +5224,7 @@
                 </a:solidFill>
                 <a:latin typeface="Arial" panose="020B0604020202020204" pitchFamily="34" charset="0"/>
               </a:rPr>
-              <a:t>フードトラックマップ（出店情報</a:t>
-            </a:r>
-            <a:r>
-              <a:rPr kumimoji="1" lang="en-US" altLang="ja-JP" sz="2000">
-                <a:solidFill>
-                  <a:srgbClr val="333333"/>
-                </a:solidFill>
-                <a:latin typeface="Arial" panose="020B0604020202020204" pitchFamily="34" charset="0"/>
-              </a:rPr>
-              <a:t>UGC×LINE</a:t>
-            </a:r>
-            <a:r>
-              <a:rPr kumimoji="1" lang="ja-JP" altLang="en-US" sz="2000">
-                <a:solidFill>
-                  <a:srgbClr val="333333"/>
-                </a:solidFill>
-                <a:latin typeface="Arial" panose="020B0604020202020204" pitchFamily="34" charset="0"/>
-              </a:rPr>
-              <a:t>通知）を新規構築</a:t>
+              <a:t>直近のコミットでは、実装の見直しと継続的な改善が行われました。</a:t>
             </a:r>
           </a:p>
         </p:txBody>
@@ -5249,7 +5234,7 @@
           <p:cNvPr id="5" name="テキスト ボックス 4">
             <a:extLst>
               <a:ext uri="{FF2B5EF4-FFF2-40B4-BE49-F238E27FC236}">
-                <a16:creationId xmlns:a16="http://schemas.microsoft.com/office/drawing/2014/main" id="{671CB621-92F8-5517-B7A1-0EB0237291CB}"/>
+                <a16:creationId xmlns:a16="http://schemas.microsoft.com/office/drawing/2014/main" id="{BBC13553-ED4C-A77D-625C-EA25933FA004}"/>
               </a:ext>
             </a:extLst>
           </p:cNvPr>
@@ -5296,7 +5281,7 @@
             <a:hlinkClick r:id="" action="ppaction://media"/>
             <a:extLst>
               <a:ext uri="{FF2B5EF4-FFF2-40B4-BE49-F238E27FC236}">
-                <a16:creationId xmlns:a16="http://schemas.microsoft.com/office/drawing/2014/main" id="{0B0C8109-D643-A8B1-831D-BE8CBB329DA5}"/>
+                <a16:creationId xmlns:a16="http://schemas.microsoft.com/office/drawing/2014/main" id="{C442DDB8-2405-DF2D-7656-C78EDAF3128B}"/>
               </a:ext>
             </a:extLst>
           </p:cNvPr>
@@ -5331,7 +5316,7 @@
     </p:spTree>
     <p:extLst>
       <p:ext uri="{BB962C8B-B14F-4D97-AF65-F5344CB8AC3E}">
-        <p14:creationId xmlns:p14="http://schemas.microsoft.com/office/powerpoint/2010/main" val="721439706"/>
+        <p14:creationId xmlns:p14="http://schemas.microsoft.com/office/powerpoint/2010/main" val="2966466554"/>
       </p:ext>
     </p:extLst>
   </p:cSld>
@@ -5340,10 +5325,10 @@
   </p:clrMapOvr>
   <mc:AlternateContent xmlns:mc="http://schemas.openxmlformats.org/markup-compatibility/2006">
     <mc:Choice xmlns:p14="http://schemas.microsoft.com/office/powerpoint/2010/main" Requires="p14">
-      <p:transition spd="slow" p14:dur="2000" advTm="10000"/>
+      <p:transition spd="slow" p14:dur="2000" advTm="7000"/>
     </mc:Choice>
     <mc:Fallback>
-      <p:transition spd="slow" advTm="10000"/>
+      <p:transition spd="slow" advTm="7000"/>
     </mc:Fallback>
   </mc:AlternateContent>
   <p:timing>
@@ -5374,7 +5359,7 @@
                                   <p:childTnLst>
                                     <p:cmd type="call" cmd="playFrom(0.0)">
                                       <p:cBhvr>
-                                        <p:cTn id="6" dur="9980" fill="hold"/>
+                                        <p:cTn id="6" dur="6076" fill="hold"/>
                                         <p:tgtEl>
                                           <p:spTgt spid="6"/>
                                         </p:tgtEl>
@@ -5455,7 +5440,7 @@
           <p:cNvPr id="2" name="テキスト ボックス 1">
             <a:extLst>
               <a:ext uri="{FF2B5EF4-FFF2-40B4-BE49-F238E27FC236}">
-                <a16:creationId xmlns:a16="http://schemas.microsoft.com/office/drawing/2014/main" id="{0DECE63A-52B5-BC9D-362F-8973C1763BF4}"/>
+                <a16:creationId xmlns:a16="http://schemas.microsoft.com/office/drawing/2014/main" id="{72876020-E59C-27C1-A1E7-A155004DBE9E}"/>
               </a:ext>
             </a:extLst>
           </p:cNvPr>
@@ -5501,7 +5486,7 @@
           <p:cNvPr id="3" name="テキスト ボックス 2">
             <a:extLst>
               <a:ext uri="{FF2B5EF4-FFF2-40B4-BE49-F238E27FC236}">
-                <a16:creationId xmlns:a16="http://schemas.microsoft.com/office/drawing/2014/main" id="{1A3EB603-3469-3E56-E95A-7A3F90A60AC6}"/>
+                <a16:creationId xmlns:a16="http://schemas.microsoft.com/office/drawing/2014/main" id="{A0C79CF7-9B95-1089-9D1A-736810271250}"/>
               </a:ext>
             </a:extLst>
           </p:cNvPr>
@@ -5541,7 +5526,7 @@
           <p:cNvPr id="4" name="テキスト ボックス 3">
             <a:extLst>
               <a:ext uri="{FF2B5EF4-FFF2-40B4-BE49-F238E27FC236}">
-                <a16:creationId xmlns:a16="http://schemas.microsoft.com/office/drawing/2014/main" id="{F10A1D9D-DD42-2B4B-350E-E9217DD4CA47}"/>
+                <a16:creationId xmlns:a16="http://schemas.microsoft.com/office/drawing/2014/main" id="{810ED7DD-DAF3-3F92-D6A3-D7E5B0EA26FE}"/>
               </a:ext>
             </a:extLst>
           </p:cNvPr>
@@ -5606,7 +5591,7 @@
           <p:cNvPr id="5" name="テキスト ボックス 4">
             <a:extLst>
               <a:ext uri="{FF2B5EF4-FFF2-40B4-BE49-F238E27FC236}">
-                <a16:creationId xmlns:a16="http://schemas.microsoft.com/office/drawing/2014/main" id="{7F1AC7C2-93C0-15E5-8694-12DF0C5A635C}"/>
+                <a16:creationId xmlns:a16="http://schemas.microsoft.com/office/drawing/2014/main" id="{0D37033D-CB07-2ADC-44DB-C2729ABCD6D1}"/>
               </a:ext>
             </a:extLst>
           </p:cNvPr>
@@ -5653,7 +5638,7 @@
             <a:hlinkClick r:id="" action="ppaction://media"/>
             <a:extLst>
               <a:ext uri="{FF2B5EF4-FFF2-40B4-BE49-F238E27FC236}">
-                <a16:creationId xmlns:a16="http://schemas.microsoft.com/office/drawing/2014/main" id="{88A655E6-77E2-2512-D93F-E5F9979F1943}"/>
+                <a16:creationId xmlns:a16="http://schemas.microsoft.com/office/drawing/2014/main" id="{F7E85D58-9A9C-0BC4-6BAF-5079DD554640}"/>
               </a:ext>
             </a:extLst>
           </p:cNvPr>
@@ -5688,7 +5673,7 @@
     </p:spTree>
     <p:extLst>
       <p:ext uri="{BB962C8B-B14F-4D97-AF65-F5344CB8AC3E}">
-        <p14:creationId xmlns:p14="http://schemas.microsoft.com/office/powerpoint/2010/main" val="304785572"/>
+        <p14:creationId xmlns:p14="http://schemas.microsoft.com/office/powerpoint/2010/main" val="3238679327"/>
       </p:ext>
     </p:extLst>
   </p:cSld>
